--- a/public/fun/pack/pptx/familypro/가족소개프리미엄_04_나혼자·1인가구_화이트골드.pptx
+++ b/public/fun/pack/pptx/familypro/가족소개프리미엄_04_나혼자·1인가구_화이트골드.pptx
@@ -113,12 +113,12 @@
   <p:extLst>
     <p:ext uri="{521415D9-36F7-43E2-AB2F-B90AF26B5E84}">
       <p14:sectionLst xmlns:p14="http://schemas.microsoft.com/office/powerpoint/2010/main">
-        <p14:section name="시작" id="{2EE0D896-3C80-4402-B600-81D4BB50254E}">
+        <p14:section name="시작" id="{A881F44A-78F5-4D8E-A74C-746F043F4F10}">
           <p14:sldIdLst>
             <p14:sldId id="256"/>
           </p14:sldIdLst>
         </p14:section>
-        <p14:section name="본문" id="{AE432C39-7E7D-43B1-B87F-A767AD12F89B}">
+        <p14:section name="본문" id="{D2A4CE84-25FB-4C47-BEC8-61659613A569}">
           <p14:sldIdLst>
             <p14:sldId id="257"/>
             <p14:sldId id="258"/>
@@ -127,7 +127,7 @@
             <p14:sldId id="261"/>
           </p14:sldIdLst>
         </p14:section>
-        <p14:section name="마무리" id="{5271573C-E99C-402C-8AAE-C0B01D13F48F}">
+        <p14:section name="마무리" id="{8E8A5A1F-FF02-4044-8CE9-5042A006A244}">
           <p14:sldIdLst>
             <p14:sldId id="262"/>
           </p14:sldIdLst>
@@ -1600,7 +1600,7 @@
             </a:lvl1pPr>
           </a:lstStyle>
           <a:p>
-            <a:fld id="{1E808679-B12B-4EAC-8711-421EEDE153D9}" type="slidenum">
+            <a:fld id="{6DDC0B15-8CC4-4E68-9B4C-8BB8B219B963}" type="slidenum">
               <a:rPr lang="en-US"/>
               <a:t>‹#›</a:t>
             </a:fld>
@@ -2360,7 +2360,7 @@
             </a:lvl1pPr>
           </a:lstStyle>
           <a:p>
-            <a:fld id="{7E2EF73F-44D5-4CAA-84F6-4F46822B406E}" type="slidenum">
+            <a:fld id="{7FEB58AA-AE92-4127-8A7B-26E104DA393C}" type="slidenum">
               <a:rPr lang="en-US"/>
               <a:t>‹#›</a:t>
             </a:fld>
@@ -3044,7 +3044,7 @@
             </a:lvl1pPr>
           </a:lstStyle>
           <a:p>
-            <a:fld id="{7D2994D0-B89E-4E11-8F55-9AB331C4C30A}" type="slidenum">
+            <a:fld id="{84A97E67-5EB2-479D-8C4A-E269B1F1DC7A}" type="slidenum">
               <a:rPr lang="en-US"/>
               <a:t>‹#›</a:t>
             </a:fld>
@@ -3867,7 +3867,7 @@
           <a:p>
             <a:r>
               <a:rPr lang="ko-KR"/>
-              <a:t>혼자 떠난 제주, 유채밭에서</a:t>
+              <a:t>혼자 떠난 길, 유채밭에서</a:t>
             </a:r>
           </a:p>
         </p:txBody>
@@ -3889,7 +3889,7 @@
           <a:p>
             <a:r>
               <a:rPr lang="ko-KR"/>
-              <a:t>나 혼자 · 1인 가구 · 0000. 00. 00</a:t>
+              <a:t>나 혼자 · 1인 가구 · 날짜 입력</a:t>
             </a:r>
           </a:p>
         </p:txBody>
@@ -4181,7 +4181,7 @@
           <a:bodyPr/>
           <a:lstStyle/>
           <a:p>
-            <a:fld id="{597305EA-9F4B-4FF0-9324-EFBABE52E176}" type="slidenum">
+            <a:fld id="{D84CCD68-D044-425E-AF9C-789E138E45B4}" type="slidenum">
               <a:rPr lang="en-US"/>
               <a:t>‹#›</a:t>
             </a:fld>
@@ -4749,7 +4749,7 @@
           <a:bodyPr/>
           <a:lstStyle/>
           <a:p>
-            <a:fld id="{B6AC6109-51FE-44BF-9719-71A183C39138}" type="slidenum">
+            <a:fld id="{DA0F45BF-B8E0-4A8F-BF9D-5DBD79B9DA20}" type="slidenum">
               <a:rPr lang="en-US"/>
               <a:t>‹#›</a:t>
             </a:fld>
@@ -5724,7 +5724,7 @@
           <a:bodyPr/>
           <a:lstStyle/>
           <a:p>
-            <a:fld id="{E77E5307-B216-4CE8-91B2-8F4F5E030537}" type="slidenum">
+            <a:fld id="{7AAA67CD-2508-4199-B90E-E9723D723B08}" type="slidenum">
               <a:rPr lang="en-US"/>
               <a:t>‹#›</a:t>
             </a:fld>
@@ -7066,7 +7066,7 @@
           <a:bodyPr/>
           <a:lstStyle/>
           <a:p>
-            <a:fld id="{2184B6E5-BEC4-4F16-A424-CD5AEB7F5D3E}" type="slidenum">
+            <a:fld id="{6D813269-1383-4BF5-B288-078F406141EC}" type="slidenum">
               <a:rPr lang="en-US"/>
               <a:t>‹#›</a:t>
             </a:fld>
@@ -7154,7 +7154,7 @@
           <a:bodyPr/>
           <a:lstStyle/>
           <a:p>
-            <a:fld id="{3E350215-CC70-4C61-944F-9222B98B5AA5}" type="slidenum">
+            <a:fld id="{C0610F8A-7CD3-46A9-BBC5-4072322F2A4A}" type="slidenum">
               <a:rPr lang="en-US"/>
               <a:t>‹#›</a:t>
             </a:fld>
